--- a/public/videos/repositories/rc-course-alert/rc-course-alert-tech-preview.pptx
+++ b/public/videos/repositories/rc-course-alert/rc-course-alert-tech-preview.pptx
@@ -134,7 +134,7 @@
           <p:cNvPr id="2" name="タイトル 1">
             <a:extLst>
               <a:ext uri="{FF2B5EF4-FFF2-40B4-BE49-F238E27FC236}">
-                <a16:creationId xmlns:a16="http://schemas.microsoft.com/office/drawing/2014/main" id="{B774B2BE-7826-6750-9DAB-244CD494736E}"/>
+                <a16:creationId xmlns:a16="http://schemas.microsoft.com/office/drawing/2014/main" id="{6DEC8E5B-F813-895E-1276-93F2D20FD579}"/>
               </a:ext>
             </a:extLst>
           </p:cNvPr>
@@ -171,7 +171,7 @@
           <p:cNvPr id="3" name="字幕 2">
             <a:extLst>
               <a:ext uri="{FF2B5EF4-FFF2-40B4-BE49-F238E27FC236}">
-                <a16:creationId xmlns:a16="http://schemas.microsoft.com/office/drawing/2014/main" id="{065D6F0C-B341-1BD3-7A74-9832865F4527}"/>
+                <a16:creationId xmlns:a16="http://schemas.microsoft.com/office/drawing/2014/main" id="{9B146960-46D5-A6B8-A3BF-083A02F2A130}"/>
               </a:ext>
             </a:extLst>
           </p:cNvPr>
@@ -241,7 +241,7 @@
           <p:cNvPr id="4" name="日付プレースホルダー 3">
             <a:extLst>
               <a:ext uri="{FF2B5EF4-FFF2-40B4-BE49-F238E27FC236}">
-                <a16:creationId xmlns:a16="http://schemas.microsoft.com/office/drawing/2014/main" id="{DA22AD05-3ADC-B64D-FCFA-8F7D2D52B1F0}"/>
+                <a16:creationId xmlns:a16="http://schemas.microsoft.com/office/drawing/2014/main" id="{7B5BA876-6738-2F61-E61D-90589DF11761}"/>
               </a:ext>
             </a:extLst>
           </p:cNvPr>
@@ -257,7 +257,7 @@
           <a:bodyPr/>
           <a:lstStyle/>
           <a:p>
-            <a:fld id="{3998C03A-F55B-44AA-8692-E621F04594BB}" type="datetimeFigureOut">
+            <a:fld id="{5F465989-7772-4AB3-9A7C-6EA849C6A8A8}" type="datetimeFigureOut">
               <a:rPr kumimoji="1" lang="ja-JP" altLang="en-US" smtClean="0"/>
               <a:t>2026/7/30</a:t>
             </a:fld>
@@ -270,7 +270,7 @@
           <p:cNvPr id="5" name="フッター プレースホルダー 4">
             <a:extLst>
               <a:ext uri="{FF2B5EF4-FFF2-40B4-BE49-F238E27FC236}">
-                <a16:creationId xmlns:a16="http://schemas.microsoft.com/office/drawing/2014/main" id="{B36651B5-AFDA-500D-3321-4A0391C4FBD3}"/>
+                <a16:creationId xmlns:a16="http://schemas.microsoft.com/office/drawing/2014/main" id="{0836AC62-4884-0047-E3BB-1DF130F2CB9F}"/>
               </a:ext>
             </a:extLst>
           </p:cNvPr>
@@ -295,7 +295,7 @@
           <p:cNvPr id="6" name="スライド番号プレースホルダー 5">
             <a:extLst>
               <a:ext uri="{FF2B5EF4-FFF2-40B4-BE49-F238E27FC236}">
-                <a16:creationId xmlns:a16="http://schemas.microsoft.com/office/drawing/2014/main" id="{D60D9643-5B8F-4168-B075-0A3BACDB1D73}"/>
+                <a16:creationId xmlns:a16="http://schemas.microsoft.com/office/drawing/2014/main" id="{19FE698C-EF15-58A4-9F2A-1C34526040D2}"/>
               </a:ext>
             </a:extLst>
           </p:cNvPr>
@@ -311,7 +311,7 @@
           <a:bodyPr/>
           <a:lstStyle/>
           <a:p>
-            <a:fld id="{AA5AB74D-6158-4197-B615-D7021483F7B9}" type="slidenum">
+            <a:fld id="{42891530-37DE-4816-8729-A04C044A10E6}" type="slidenum">
               <a:rPr kumimoji="1" lang="ja-JP" altLang="en-US" smtClean="0"/>
               <a:t>‹#›</a:t>
             </a:fld>
@@ -322,7 +322,7 @@
     </p:spTree>
     <p:extLst>
       <p:ext uri="{BB962C8B-B14F-4D97-AF65-F5344CB8AC3E}">
-        <p14:creationId xmlns:p14="http://schemas.microsoft.com/office/powerpoint/2010/main" val="2429067645"/>
+        <p14:creationId xmlns:p14="http://schemas.microsoft.com/office/powerpoint/2010/main" val="4097805966"/>
       </p:ext>
     </p:extLst>
   </p:cSld>
@@ -354,7 +354,7 @@
           <p:cNvPr id="2" name="タイトル 1">
             <a:extLst>
               <a:ext uri="{FF2B5EF4-FFF2-40B4-BE49-F238E27FC236}">
-                <a16:creationId xmlns:a16="http://schemas.microsoft.com/office/drawing/2014/main" id="{9583FCD6-8788-60E7-6147-81CF22725644}"/>
+                <a16:creationId xmlns:a16="http://schemas.microsoft.com/office/drawing/2014/main" id="{60C0562D-A33E-06F3-9AEF-ECE690663541}"/>
               </a:ext>
             </a:extLst>
           </p:cNvPr>
@@ -382,7 +382,7 @@
           <p:cNvPr id="3" name="縦書きテキスト プレースホルダー 2">
             <a:extLst>
               <a:ext uri="{FF2B5EF4-FFF2-40B4-BE49-F238E27FC236}">
-                <a16:creationId xmlns:a16="http://schemas.microsoft.com/office/drawing/2014/main" id="{EA5B86E3-ABB2-6C42-3E99-FE091167E421}"/>
+                <a16:creationId xmlns:a16="http://schemas.microsoft.com/office/drawing/2014/main" id="{F2188D40-CCC7-DC70-9CE5-EF05068D6B88}"/>
               </a:ext>
             </a:extLst>
           </p:cNvPr>
@@ -471,7 +471,7 @@
           <p:cNvPr id="4" name="日付プレースホルダー 3">
             <a:extLst>
               <a:ext uri="{FF2B5EF4-FFF2-40B4-BE49-F238E27FC236}">
-                <a16:creationId xmlns:a16="http://schemas.microsoft.com/office/drawing/2014/main" id="{21D6D003-3033-98AE-2834-60A7D7F1B093}"/>
+                <a16:creationId xmlns:a16="http://schemas.microsoft.com/office/drawing/2014/main" id="{E1B69D72-F3D2-0878-2782-17E1202F81D3}"/>
               </a:ext>
             </a:extLst>
           </p:cNvPr>
@@ -487,7 +487,7 @@
           <a:bodyPr/>
           <a:lstStyle/>
           <a:p>
-            <a:fld id="{3998C03A-F55B-44AA-8692-E621F04594BB}" type="datetimeFigureOut">
+            <a:fld id="{5F465989-7772-4AB3-9A7C-6EA849C6A8A8}" type="datetimeFigureOut">
               <a:rPr kumimoji="1" lang="ja-JP" altLang="en-US" smtClean="0"/>
               <a:t>2026/7/30</a:t>
             </a:fld>
@@ -500,7 +500,7 @@
           <p:cNvPr id="5" name="フッター プレースホルダー 4">
             <a:extLst>
               <a:ext uri="{FF2B5EF4-FFF2-40B4-BE49-F238E27FC236}">
-                <a16:creationId xmlns:a16="http://schemas.microsoft.com/office/drawing/2014/main" id="{9ED2486A-9D0C-1E83-6181-2D0482F38ABE}"/>
+                <a16:creationId xmlns:a16="http://schemas.microsoft.com/office/drawing/2014/main" id="{EE4EFE4F-3FD5-5192-68DB-276ED73472D1}"/>
               </a:ext>
             </a:extLst>
           </p:cNvPr>
@@ -525,7 +525,7 @@
           <p:cNvPr id="6" name="スライド番号プレースホルダー 5">
             <a:extLst>
               <a:ext uri="{FF2B5EF4-FFF2-40B4-BE49-F238E27FC236}">
-                <a16:creationId xmlns:a16="http://schemas.microsoft.com/office/drawing/2014/main" id="{733D4F88-BA9A-5CD5-DA9A-CA56D6E5F1B2}"/>
+                <a16:creationId xmlns:a16="http://schemas.microsoft.com/office/drawing/2014/main" id="{30B05C92-1B00-E2FB-262B-6BDA3140EA5F}"/>
               </a:ext>
             </a:extLst>
           </p:cNvPr>
@@ -541,7 +541,7 @@
           <a:bodyPr/>
           <a:lstStyle/>
           <a:p>
-            <a:fld id="{AA5AB74D-6158-4197-B615-D7021483F7B9}" type="slidenum">
+            <a:fld id="{42891530-37DE-4816-8729-A04C044A10E6}" type="slidenum">
               <a:rPr kumimoji="1" lang="ja-JP" altLang="en-US" smtClean="0"/>
               <a:t>‹#›</a:t>
             </a:fld>
@@ -552,7 +552,7 @@
     </p:spTree>
     <p:extLst>
       <p:ext uri="{BB962C8B-B14F-4D97-AF65-F5344CB8AC3E}">
-        <p14:creationId xmlns:p14="http://schemas.microsoft.com/office/powerpoint/2010/main" val="1171814356"/>
+        <p14:creationId xmlns:p14="http://schemas.microsoft.com/office/powerpoint/2010/main" val="3243570213"/>
       </p:ext>
     </p:extLst>
   </p:cSld>
@@ -584,7 +584,7 @@
           <p:cNvPr id="2" name="縦書きタイトル 1">
             <a:extLst>
               <a:ext uri="{FF2B5EF4-FFF2-40B4-BE49-F238E27FC236}">
-                <a16:creationId xmlns:a16="http://schemas.microsoft.com/office/drawing/2014/main" id="{F81C9CB5-3DFB-3F9D-9B25-B4A9E9801674}"/>
+                <a16:creationId xmlns:a16="http://schemas.microsoft.com/office/drawing/2014/main" id="{0B76304C-2CBD-30B4-43A0-6D2F425404E9}"/>
               </a:ext>
             </a:extLst>
           </p:cNvPr>
@@ -617,7 +617,7 @@
           <p:cNvPr id="3" name="縦書きテキスト プレースホルダー 2">
             <a:extLst>
               <a:ext uri="{FF2B5EF4-FFF2-40B4-BE49-F238E27FC236}">
-                <a16:creationId xmlns:a16="http://schemas.microsoft.com/office/drawing/2014/main" id="{23B06FDD-A98E-1075-9B3C-A6FF915CD267}"/>
+                <a16:creationId xmlns:a16="http://schemas.microsoft.com/office/drawing/2014/main" id="{B8E03C59-60C9-98FF-35EE-354848537882}"/>
               </a:ext>
             </a:extLst>
           </p:cNvPr>
@@ -711,7 +711,7 @@
           <p:cNvPr id="4" name="日付プレースホルダー 3">
             <a:extLst>
               <a:ext uri="{FF2B5EF4-FFF2-40B4-BE49-F238E27FC236}">
-                <a16:creationId xmlns:a16="http://schemas.microsoft.com/office/drawing/2014/main" id="{F97A38BE-824F-01F7-01EC-00C1AA437C74}"/>
+                <a16:creationId xmlns:a16="http://schemas.microsoft.com/office/drawing/2014/main" id="{5D654B1C-C78B-5177-E40B-D96C6BD05052}"/>
               </a:ext>
             </a:extLst>
           </p:cNvPr>
@@ -727,7 +727,7 @@
           <a:bodyPr/>
           <a:lstStyle/>
           <a:p>
-            <a:fld id="{3998C03A-F55B-44AA-8692-E621F04594BB}" type="datetimeFigureOut">
+            <a:fld id="{5F465989-7772-4AB3-9A7C-6EA849C6A8A8}" type="datetimeFigureOut">
               <a:rPr kumimoji="1" lang="ja-JP" altLang="en-US" smtClean="0"/>
               <a:t>2026/7/30</a:t>
             </a:fld>
@@ -740,7 +740,7 @@
           <p:cNvPr id="5" name="フッター プレースホルダー 4">
             <a:extLst>
               <a:ext uri="{FF2B5EF4-FFF2-40B4-BE49-F238E27FC236}">
-                <a16:creationId xmlns:a16="http://schemas.microsoft.com/office/drawing/2014/main" id="{299FC250-2D7F-E005-7596-C160DC68A2F2}"/>
+                <a16:creationId xmlns:a16="http://schemas.microsoft.com/office/drawing/2014/main" id="{ECF49AF6-8783-58B9-751E-F07F4A17BE9C}"/>
               </a:ext>
             </a:extLst>
           </p:cNvPr>
@@ -765,7 +765,7 @@
           <p:cNvPr id="6" name="スライド番号プレースホルダー 5">
             <a:extLst>
               <a:ext uri="{FF2B5EF4-FFF2-40B4-BE49-F238E27FC236}">
-                <a16:creationId xmlns:a16="http://schemas.microsoft.com/office/drawing/2014/main" id="{61C3E9DC-79B5-3E48-68AD-3164FFFE8E64}"/>
+                <a16:creationId xmlns:a16="http://schemas.microsoft.com/office/drawing/2014/main" id="{BA67C2D8-F939-806B-6D0A-31A7752BDFE4}"/>
               </a:ext>
             </a:extLst>
           </p:cNvPr>
@@ -781,7 +781,7 @@
           <a:bodyPr/>
           <a:lstStyle/>
           <a:p>
-            <a:fld id="{AA5AB74D-6158-4197-B615-D7021483F7B9}" type="slidenum">
+            <a:fld id="{42891530-37DE-4816-8729-A04C044A10E6}" type="slidenum">
               <a:rPr kumimoji="1" lang="ja-JP" altLang="en-US" smtClean="0"/>
               <a:t>‹#›</a:t>
             </a:fld>
@@ -792,7 +792,7 @@
     </p:spTree>
     <p:extLst>
       <p:ext uri="{BB962C8B-B14F-4D97-AF65-F5344CB8AC3E}">
-        <p14:creationId xmlns:p14="http://schemas.microsoft.com/office/powerpoint/2010/main" val="491286900"/>
+        <p14:creationId xmlns:p14="http://schemas.microsoft.com/office/powerpoint/2010/main" val="3911025563"/>
       </p:ext>
     </p:extLst>
   </p:cSld>
@@ -824,7 +824,7 @@
           <p:cNvPr id="2" name="タイトル 1">
             <a:extLst>
               <a:ext uri="{FF2B5EF4-FFF2-40B4-BE49-F238E27FC236}">
-                <a16:creationId xmlns:a16="http://schemas.microsoft.com/office/drawing/2014/main" id="{0B052AA6-6540-3986-101A-139EE9C38912}"/>
+                <a16:creationId xmlns:a16="http://schemas.microsoft.com/office/drawing/2014/main" id="{DE83D0EC-64D8-2F26-E7B0-371D8EC26745}"/>
               </a:ext>
             </a:extLst>
           </p:cNvPr>
@@ -852,7 +852,7 @@
           <p:cNvPr id="3" name="コンテンツ プレースホルダー 2">
             <a:extLst>
               <a:ext uri="{FF2B5EF4-FFF2-40B4-BE49-F238E27FC236}">
-                <a16:creationId xmlns:a16="http://schemas.microsoft.com/office/drawing/2014/main" id="{B9DFAD4F-7891-F94A-0A53-A27B1887C419}"/>
+                <a16:creationId xmlns:a16="http://schemas.microsoft.com/office/drawing/2014/main" id="{D7F441CA-5C35-4841-529B-666C7A708522}"/>
               </a:ext>
             </a:extLst>
           </p:cNvPr>
@@ -941,7 +941,7 @@
           <p:cNvPr id="4" name="日付プレースホルダー 3">
             <a:extLst>
               <a:ext uri="{FF2B5EF4-FFF2-40B4-BE49-F238E27FC236}">
-                <a16:creationId xmlns:a16="http://schemas.microsoft.com/office/drawing/2014/main" id="{AA4794E7-FB9C-C98B-A020-79863C5272DA}"/>
+                <a16:creationId xmlns:a16="http://schemas.microsoft.com/office/drawing/2014/main" id="{49074ABE-34D6-59E6-DC9C-2DFED09545D9}"/>
               </a:ext>
             </a:extLst>
           </p:cNvPr>
@@ -957,7 +957,7 @@
           <a:bodyPr/>
           <a:lstStyle/>
           <a:p>
-            <a:fld id="{3998C03A-F55B-44AA-8692-E621F04594BB}" type="datetimeFigureOut">
+            <a:fld id="{5F465989-7772-4AB3-9A7C-6EA849C6A8A8}" type="datetimeFigureOut">
               <a:rPr kumimoji="1" lang="ja-JP" altLang="en-US" smtClean="0"/>
               <a:t>2026/7/30</a:t>
             </a:fld>
@@ -970,7 +970,7 @@
           <p:cNvPr id="5" name="フッター プレースホルダー 4">
             <a:extLst>
               <a:ext uri="{FF2B5EF4-FFF2-40B4-BE49-F238E27FC236}">
-                <a16:creationId xmlns:a16="http://schemas.microsoft.com/office/drawing/2014/main" id="{ED35D780-DE34-C50C-A932-FB9EB2955AC7}"/>
+                <a16:creationId xmlns:a16="http://schemas.microsoft.com/office/drawing/2014/main" id="{81883194-73BF-55B0-D818-D78C1863DFD2}"/>
               </a:ext>
             </a:extLst>
           </p:cNvPr>
@@ -995,7 +995,7 @@
           <p:cNvPr id="6" name="スライド番号プレースホルダー 5">
             <a:extLst>
               <a:ext uri="{FF2B5EF4-FFF2-40B4-BE49-F238E27FC236}">
-                <a16:creationId xmlns:a16="http://schemas.microsoft.com/office/drawing/2014/main" id="{772F91FE-1631-AF78-F545-DC8A12F0C318}"/>
+                <a16:creationId xmlns:a16="http://schemas.microsoft.com/office/drawing/2014/main" id="{3C350946-A161-DA1C-9373-7991C7D9991E}"/>
               </a:ext>
             </a:extLst>
           </p:cNvPr>
@@ -1011,7 +1011,7 @@
           <a:bodyPr/>
           <a:lstStyle/>
           <a:p>
-            <a:fld id="{AA5AB74D-6158-4197-B615-D7021483F7B9}" type="slidenum">
+            <a:fld id="{42891530-37DE-4816-8729-A04C044A10E6}" type="slidenum">
               <a:rPr kumimoji="1" lang="ja-JP" altLang="en-US" smtClean="0"/>
               <a:t>‹#›</a:t>
             </a:fld>
@@ -1022,7 +1022,7 @@
     </p:spTree>
     <p:extLst>
       <p:ext uri="{BB962C8B-B14F-4D97-AF65-F5344CB8AC3E}">
-        <p14:creationId xmlns:p14="http://schemas.microsoft.com/office/powerpoint/2010/main" val="3270418157"/>
+        <p14:creationId xmlns:p14="http://schemas.microsoft.com/office/powerpoint/2010/main" val="237712713"/>
       </p:ext>
     </p:extLst>
   </p:cSld>
@@ -1054,7 +1054,7 @@
           <p:cNvPr id="2" name="タイトル 1">
             <a:extLst>
               <a:ext uri="{FF2B5EF4-FFF2-40B4-BE49-F238E27FC236}">
-                <a16:creationId xmlns:a16="http://schemas.microsoft.com/office/drawing/2014/main" id="{331515F3-B12E-7800-33B7-2BAFAD41A718}"/>
+                <a16:creationId xmlns:a16="http://schemas.microsoft.com/office/drawing/2014/main" id="{AD041AEA-6F2D-8C5A-B57B-9847DB9CD853}"/>
               </a:ext>
             </a:extLst>
           </p:cNvPr>
@@ -1091,7 +1091,7 @@
           <p:cNvPr id="3" name="テキスト プレースホルダー 2">
             <a:extLst>
               <a:ext uri="{FF2B5EF4-FFF2-40B4-BE49-F238E27FC236}">
-                <a16:creationId xmlns:a16="http://schemas.microsoft.com/office/drawing/2014/main" id="{F652F4AF-97FD-1D03-CFBB-4C0F0E1F9E52}"/>
+                <a16:creationId xmlns:a16="http://schemas.microsoft.com/office/drawing/2014/main" id="{E8716C31-3E3C-882C-FD9B-FE928FFFC6A9}"/>
               </a:ext>
             </a:extLst>
           </p:cNvPr>
@@ -1216,7 +1216,7 @@
           <p:cNvPr id="4" name="日付プレースホルダー 3">
             <a:extLst>
               <a:ext uri="{FF2B5EF4-FFF2-40B4-BE49-F238E27FC236}">
-                <a16:creationId xmlns:a16="http://schemas.microsoft.com/office/drawing/2014/main" id="{6A0465BC-85FF-1565-EAD3-9E23E49C2278}"/>
+                <a16:creationId xmlns:a16="http://schemas.microsoft.com/office/drawing/2014/main" id="{508B2652-50E5-6E19-5FFC-F0D035BB10D8}"/>
               </a:ext>
             </a:extLst>
           </p:cNvPr>
@@ -1232,7 +1232,7 @@
           <a:bodyPr/>
           <a:lstStyle/>
           <a:p>
-            <a:fld id="{3998C03A-F55B-44AA-8692-E621F04594BB}" type="datetimeFigureOut">
+            <a:fld id="{5F465989-7772-4AB3-9A7C-6EA849C6A8A8}" type="datetimeFigureOut">
               <a:rPr kumimoji="1" lang="ja-JP" altLang="en-US" smtClean="0"/>
               <a:t>2026/7/30</a:t>
             </a:fld>
@@ -1245,7 +1245,7 @@
           <p:cNvPr id="5" name="フッター プレースホルダー 4">
             <a:extLst>
               <a:ext uri="{FF2B5EF4-FFF2-40B4-BE49-F238E27FC236}">
-                <a16:creationId xmlns:a16="http://schemas.microsoft.com/office/drawing/2014/main" id="{40BECB9D-404E-F958-6424-ADBC366D3542}"/>
+                <a16:creationId xmlns:a16="http://schemas.microsoft.com/office/drawing/2014/main" id="{A90E7CA9-4A94-CE37-5482-FBB3596C9D7A}"/>
               </a:ext>
             </a:extLst>
           </p:cNvPr>
@@ -1270,7 +1270,7 @@
           <p:cNvPr id="6" name="スライド番号プレースホルダー 5">
             <a:extLst>
               <a:ext uri="{FF2B5EF4-FFF2-40B4-BE49-F238E27FC236}">
-                <a16:creationId xmlns:a16="http://schemas.microsoft.com/office/drawing/2014/main" id="{7BFCFF7B-8439-E6C1-E4BA-C7A2B2465BC6}"/>
+                <a16:creationId xmlns:a16="http://schemas.microsoft.com/office/drawing/2014/main" id="{2F8CF828-1573-11CB-FE68-B63514B4B045}"/>
               </a:ext>
             </a:extLst>
           </p:cNvPr>
@@ -1286,7 +1286,7 @@
           <a:bodyPr/>
           <a:lstStyle/>
           <a:p>
-            <a:fld id="{AA5AB74D-6158-4197-B615-D7021483F7B9}" type="slidenum">
+            <a:fld id="{42891530-37DE-4816-8729-A04C044A10E6}" type="slidenum">
               <a:rPr kumimoji="1" lang="ja-JP" altLang="en-US" smtClean="0"/>
               <a:t>‹#›</a:t>
             </a:fld>
@@ -1297,7 +1297,7 @@
     </p:spTree>
     <p:extLst>
       <p:ext uri="{BB962C8B-B14F-4D97-AF65-F5344CB8AC3E}">
-        <p14:creationId xmlns:p14="http://schemas.microsoft.com/office/powerpoint/2010/main" val="3314847805"/>
+        <p14:creationId xmlns:p14="http://schemas.microsoft.com/office/powerpoint/2010/main" val="3487998572"/>
       </p:ext>
     </p:extLst>
   </p:cSld>
@@ -1329,7 +1329,7 @@
           <p:cNvPr id="2" name="タイトル 1">
             <a:extLst>
               <a:ext uri="{FF2B5EF4-FFF2-40B4-BE49-F238E27FC236}">
-                <a16:creationId xmlns:a16="http://schemas.microsoft.com/office/drawing/2014/main" id="{142C678F-5080-8804-2E74-D1E63E27649F}"/>
+                <a16:creationId xmlns:a16="http://schemas.microsoft.com/office/drawing/2014/main" id="{D04427A2-D4E6-27AA-91C0-8DF3CD619C0B}"/>
               </a:ext>
             </a:extLst>
           </p:cNvPr>
@@ -1357,7 +1357,7 @@
           <p:cNvPr id="3" name="コンテンツ プレースホルダー 2">
             <a:extLst>
               <a:ext uri="{FF2B5EF4-FFF2-40B4-BE49-F238E27FC236}">
-                <a16:creationId xmlns:a16="http://schemas.microsoft.com/office/drawing/2014/main" id="{6D0AA5D7-4B16-3982-B5CB-3B26BBE27FE8}"/>
+                <a16:creationId xmlns:a16="http://schemas.microsoft.com/office/drawing/2014/main" id="{57F34C0F-D532-73F2-39DD-3021F7FC0B6D}"/>
               </a:ext>
             </a:extLst>
           </p:cNvPr>
@@ -1451,7 +1451,7 @@
           <p:cNvPr id="4" name="コンテンツ プレースホルダー 3">
             <a:extLst>
               <a:ext uri="{FF2B5EF4-FFF2-40B4-BE49-F238E27FC236}">
-                <a16:creationId xmlns:a16="http://schemas.microsoft.com/office/drawing/2014/main" id="{D54E8932-2D1C-717C-FD6C-C1575DA2D2E0}"/>
+                <a16:creationId xmlns:a16="http://schemas.microsoft.com/office/drawing/2014/main" id="{FD096C19-64C0-E10A-4721-E8DF9D4597A7}"/>
               </a:ext>
             </a:extLst>
           </p:cNvPr>
@@ -1545,7 +1545,7 @@
           <p:cNvPr id="5" name="日付プレースホルダー 4">
             <a:extLst>
               <a:ext uri="{FF2B5EF4-FFF2-40B4-BE49-F238E27FC236}">
-                <a16:creationId xmlns:a16="http://schemas.microsoft.com/office/drawing/2014/main" id="{69FD8588-180C-C97C-D0A3-736C2F65456B}"/>
+                <a16:creationId xmlns:a16="http://schemas.microsoft.com/office/drawing/2014/main" id="{9CCDF50C-599A-2BDC-8617-A498BA5F716F}"/>
               </a:ext>
             </a:extLst>
           </p:cNvPr>
@@ -1561,7 +1561,7 @@
           <a:bodyPr/>
           <a:lstStyle/>
           <a:p>
-            <a:fld id="{3998C03A-F55B-44AA-8692-E621F04594BB}" type="datetimeFigureOut">
+            <a:fld id="{5F465989-7772-4AB3-9A7C-6EA849C6A8A8}" type="datetimeFigureOut">
               <a:rPr kumimoji="1" lang="ja-JP" altLang="en-US" smtClean="0"/>
               <a:t>2026/7/30</a:t>
             </a:fld>
@@ -1574,7 +1574,7 @@
           <p:cNvPr id="6" name="フッター プレースホルダー 5">
             <a:extLst>
               <a:ext uri="{FF2B5EF4-FFF2-40B4-BE49-F238E27FC236}">
-                <a16:creationId xmlns:a16="http://schemas.microsoft.com/office/drawing/2014/main" id="{330794AE-AC19-D2AF-D892-A15732B56F3A}"/>
+                <a16:creationId xmlns:a16="http://schemas.microsoft.com/office/drawing/2014/main" id="{17D028A4-C758-D505-DF9C-B7CFAAC9CC92}"/>
               </a:ext>
             </a:extLst>
           </p:cNvPr>
@@ -1599,7 +1599,7 @@
           <p:cNvPr id="7" name="スライド番号プレースホルダー 6">
             <a:extLst>
               <a:ext uri="{FF2B5EF4-FFF2-40B4-BE49-F238E27FC236}">
-                <a16:creationId xmlns:a16="http://schemas.microsoft.com/office/drawing/2014/main" id="{5C357903-530A-7653-F129-670BE7E537C7}"/>
+                <a16:creationId xmlns:a16="http://schemas.microsoft.com/office/drawing/2014/main" id="{D9E04BF3-6329-4177-1FF7-C52DA40DBD1B}"/>
               </a:ext>
             </a:extLst>
           </p:cNvPr>
@@ -1615,7 +1615,7 @@
           <a:bodyPr/>
           <a:lstStyle/>
           <a:p>
-            <a:fld id="{AA5AB74D-6158-4197-B615-D7021483F7B9}" type="slidenum">
+            <a:fld id="{42891530-37DE-4816-8729-A04C044A10E6}" type="slidenum">
               <a:rPr kumimoji="1" lang="ja-JP" altLang="en-US" smtClean="0"/>
               <a:t>‹#›</a:t>
             </a:fld>
@@ -1626,7 +1626,7 @@
     </p:spTree>
     <p:extLst>
       <p:ext uri="{BB962C8B-B14F-4D97-AF65-F5344CB8AC3E}">
-        <p14:creationId xmlns:p14="http://schemas.microsoft.com/office/powerpoint/2010/main" val="3404755166"/>
+        <p14:creationId xmlns:p14="http://schemas.microsoft.com/office/powerpoint/2010/main" val="3971221467"/>
       </p:ext>
     </p:extLst>
   </p:cSld>
@@ -1658,7 +1658,7 @@
           <p:cNvPr id="2" name="タイトル 1">
             <a:extLst>
               <a:ext uri="{FF2B5EF4-FFF2-40B4-BE49-F238E27FC236}">
-                <a16:creationId xmlns:a16="http://schemas.microsoft.com/office/drawing/2014/main" id="{94AADD48-DACB-2284-4597-E0FCF52160AD}"/>
+                <a16:creationId xmlns:a16="http://schemas.microsoft.com/office/drawing/2014/main" id="{19A17906-C016-D1FF-513A-E3CD2D570F02}"/>
               </a:ext>
             </a:extLst>
           </p:cNvPr>
@@ -1691,7 +1691,7 @@
           <p:cNvPr id="3" name="テキスト プレースホルダー 2">
             <a:extLst>
               <a:ext uri="{FF2B5EF4-FFF2-40B4-BE49-F238E27FC236}">
-                <a16:creationId xmlns:a16="http://schemas.microsoft.com/office/drawing/2014/main" id="{1C43C67C-6055-74DF-1150-5C4C20D73805}"/>
+                <a16:creationId xmlns:a16="http://schemas.microsoft.com/office/drawing/2014/main" id="{2A396094-5DAD-490F-E9E2-DA6A10828295}"/>
               </a:ext>
             </a:extLst>
           </p:cNvPr>
@@ -1762,7 +1762,7 @@
           <p:cNvPr id="4" name="コンテンツ プレースホルダー 3">
             <a:extLst>
               <a:ext uri="{FF2B5EF4-FFF2-40B4-BE49-F238E27FC236}">
-                <a16:creationId xmlns:a16="http://schemas.microsoft.com/office/drawing/2014/main" id="{A8DF4667-3089-EEE7-0AE6-2280EE65F777}"/>
+                <a16:creationId xmlns:a16="http://schemas.microsoft.com/office/drawing/2014/main" id="{1B04EA69-F9CB-8A0A-8E91-BC0AE951AB28}"/>
               </a:ext>
             </a:extLst>
           </p:cNvPr>
@@ -1856,7 +1856,7 @@
           <p:cNvPr id="5" name="テキスト プレースホルダー 4">
             <a:extLst>
               <a:ext uri="{FF2B5EF4-FFF2-40B4-BE49-F238E27FC236}">
-                <a16:creationId xmlns:a16="http://schemas.microsoft.com/office/drawing/2014/main" id="{5BF5A6C1-7078-6508-F39F-CFE5CA2ED374}"/>
+                <a16:creationId xmlns:a16="http://schemas.microsoft.com/office/drawing/2014/main" id="{BB119715-DA7F-899A-6418-E5B8BD5D8EFD}"/>
               </a:ext>
             </a:extLst>
           </p:cNvPr>
@@ -1927,7 +1927,7 @@
           <p:cNvPr id="6" name="コンテンツ プレースホルダー 5">
             <a:extLst>
               <a:ext uri="{FF2B5EF4-FFF2-40B4-BE49-F238E27FC236}">
-                <a16:creationId xmlns:a16="http://schemas.microsoft.com/office/drawing/2014/main" id="{D7AD0639-FDF0-3C79-1DC0-033C9742CE2D}"/>
+                <a16:creationId xmlns:a16="http://schemas.microsoft.com/office/drawing/2014/main" id="{02F29178-4136-B577-BED2-A7FB60EE6600}"/>
               </a:ext>
             </a:extLst>
           </p:cNvPr>
@@ -2021,7 +2021,7 @@
           <p:cNvPr id="7" name="日付プレースホルダー 6">
             <a:extLst>
               <a:ext uri="{FF2B5EF4-FFF2-40B4-BE49-F238E27FC236}">
-                <a16:creationId xmlns:a16="http://schemas.microsoft.com/office/drawing/2014/main" id="{90AE2303-DA96-278F-D1B1-2ED35B4E32F4}"/>
+                <a16:creationId xmlns:a16="http://schemas.microsoft.com/office/drawing/2014/main" id="{5073D70C-41BC-4F95-6FFE-34C28781A7D9}"/>
               </a:ext>
             </a:extLst>
           </p:cNvPr>
@@ -2037,7 +2037,7 @@
           <a:bodyPr/>
           <a:lstStyle/>
           <a:p>
-            <a:fld id="{3998C03A-F55B-44AA-8692-E621F04594BB}" type="datetimeFigureOut">
+            <a:fld id="{5F465989-7772-4AB3-9A7C-6EA849C6A8A8}" type="datetimeFigureOut">
               <a:rPr kumimoji="1" lang="ja-JP" altLang="en-US" smtClean="0"/>
               <a:t>2026/7/30</a:t>
             </a:fld>
@@ -2050,7 +2050,7 @@
           <p:cNvPr id="8" name="フッター プレースホルダー 7">
             <a:extLst>
               <a:ext uri="{FF2B5EF4-FFF2-40B4-BE49-F238E27FC236}">
-                <a16:creationId xmlns:a16="http://schemas.microsoft.com/office/drawing/2014/main" id="{72BAB91D-0CF3-F388-654F-C66D8C7FD147}"/>
+                <a16:creationId xmlns:a16="http://schemas.microsoft.com/office/drawing/2014/main" id="{C71D0171-0B60-10B0-9BE9-CB707C123DE5}"/>
               </a:ext>
             </a:extLst>
           </p:cNvPr>
@@ -2075,7 +2075,7 @@
           <p:cNvPr id="9" name="スライド番号プレースホルダー 8">
             <a:extLst>
               <a:ext uri="{FF2B5EF4-FFF2-40B4-BE49-F238E27FC236}">
-                <a16:creationId xmlns:a16="http://schemas.microsoft.com/office/drawing/2014/main" id="{269CF78A-82B6-97DF-AEEF-334F37F745C0}"/>
+                <a16:creationId xmlns:a16="http://schemas.microsoft.com/office/drawing/2014/main" id="{1F78D71D-1D00-AE1A-86CB-23AE07B746B7}"/>
               </a:ext>
             </a:extLst>
           </p:cNvPr>
@@ -2091,7 +2091,7 @@
           <a:bodyPr/>
           <a:lstStyle/>
           <a:p>
-            <a:fld id="{AA5AB74D-6158-4197-B615-D7021483F7B9}" type="slidenum">
+            <a:fld id="{42891530-37DE-4816-8729-A04C044A10E6}" type="slidenum">
               <a:rPr kumimoji="1" lang="ja-JP" altLang="en-US" smtClean="0"/>
               <a:t>‹#›</a:t>
             </a:fld>
@@ -2102,7 +2102,7 @@
     </p:spTree>
     <p:extLst>
       <p:ext uri="{BB962C8B-B14F-4D97-AF65-F5344CB8AC3E}">
-        <p14:creationId xmlns:p14="http://schemas.microsoft.com/office/powerpoint/2010/main" val="2301221739"/>
+        <p14:creationId xmlns:p14="http://schemas.microsoft.com/office/powerpoint/2010/main" val="2371285350"/>
       </p:ext>
     </p:extLst>
   </p:cSld>
@@ -2134,7 +2134,7 @@
           <p:cNvPr id="2" name="タイトル 1">
             <a:extLst>
               <a:ext uri="{FF2B5EF4-FFF2-40B4-BE49-F238E27FC236}">
-                <a16:creationId xmlns:a16="http://schemas.microsoft.com/office/drawing/2014/main" id="{F800AE0C-6391-E90B-FB88-B8365D63C960}"/>
+                <a16:creationId xmlns:a16="http://schemas.microsoft.com/office/drawing/2014/main" id="{51C6F526-3383-6ECD-8527-28C252B251D4}"/>
               </a:ext>
             </a:extLst>
           </p:cNvPr>
@@ -2162,7 +2162,7 @@
           <p:cNvPr id="3" name="日付プレースホルダー 2">
             <a:extLst>
               <a:ext uri="{FF2B5EF4-FFF2-40B4-BE49-F238E27FC236}">
-                <a16:creationId xmlns:a16="http://schemas.microsoft.com/office/drawing/2014/main" id="{09D14008-E43F-F568-4158-4B25BDBE194D}"/>
+                <a16:creationId xmlns:a16="http://schemas.microsoft.com/office/drawing/2014/main" id="{3C045204-F9C7-66A0-5DBE-73E499FD2B55}"/>
               </a:ext>
             </a:extLst>
           </p:cNvPr>
@@ -2178,7 +2178,7 @@
           <a:bodyPr/>
           <a:lstStyle/>
           <a:p>
-            <a:fld id="{3998C03A-F55B-44AA-8692-E621F04594BB}" type="datetimeFigureOut">
+            <a:fld id="{5F465989-7772-4AB3-9A7C-6EA849C6A8A8}" type="datetimeFigureOut">
               <a:rPr kumimoji="1" lang="ja-JP" altLang="en-US" smtClean="0"/>
               <a:t>2026/7/30</a:t>
             </a:fld>
@@ -2191,7 +2191,7 @@
           <p:cNvPr id="4" name="フッター プレースホルダー 3">
             <a:extLst>
               <a:ext uri="{FF2B5EF4-FFF2-40B4-BE49-F238E27FC236}">
-                <a16:creationId xmlns:a16="http://schemas.microsoft.com/office/drawing/2014/main" id="{AC966448-354A-1593-D95E-6FE9CD98DAF7}"/>
+                <a16:creationId xmlns:a16="http://schemas.microsoft.com/office/drawing/2014/main" id="{E1F7574D-BCE5-C41D-820E-500BF00A3726}"/>
               </a:ext>
             </a:extLst>
           </p:cNvPr>
@@ -2216,7 +2216,7 @@
           <p:cNvPr id="5" name="スライド番号プレースホルダー 4">
             <a:extLst>
               <a:ext uri="{FF2B5EF4-FFF2-40B4-BE49-F238E27FC236}">
-                <a16:creationId xmlns:a16="http://schemas.microsoft.com/office/drawing/2014/main" id="{EA963E53-8922-8B78-1C2E-CE7C39FCFDBC}"/>
+                <a16:creationId xmlns:a16="http://schemas.microsoft.com/office/drawing/2014/main" id="{6C275B9A-4EF8-CEC8-88E5-4E1F158D9739}"/>
               </a:ext>
             </a:extLst>
           </p:cNvPr>
@@ -2232,7 +2232,7 @@
           <a:bodyPr/>
           <a:lstStyle/>
           <a:p>
-            <a:fld id="{AA5AB74D-6158-4197-B615-D7021483F7B9}" type="slidenum">
+            <a:fld id="{42891530-37DE-4816-8729-A04C044A10E6}" type="slidenum">
               <a:rPr kumimoji="1" lang="ja-JP" altLang="en-US" smtClean="0"/>
               <a:t>‹#›</a:t>
             </a:fld>
@@ -2243,7 +2243,7 @@
     </p:spTree>
     <p:extLst>
       <p:ext uri="{BB962C8B-B14F-4D97-AF65-F5344CB8AC3E}">
-        <p14:creationId xmlns:p14="http://schemas.microsoft.com/office/powerpoint/2010/main" val="496450693"/>
+        <p14:creationId xmlns:p14="http://schemas.microsoft.com/office/powerpoint/2010/main" val="2439801810"/>
       </p:ext>
     </p:extLst>
   </p:cSld>
@@ -2275,7 +2275,7 @@
           <p:cNvPr id="2" name="日付プレースホルダー 1">
             <a:extLst>
               <a:ext uri="{FF2B5EF4-FFF2-40B4-BE49-F238E27FC236}">
-                <a16:creationId xmlns:a16="http://schemas.microsoft.com/office/drawing/2014/main" id="{5B0701D3-E32A-8F32-29AB-CBB2DB0100F9}"/>
+                <a16:creationId xmlns:a16="http://schemas.microsoft.com/office/drawing/2014/main" id="{3889A882-D91A-A82B-43D2-5B9D4082859A}"/>
               </a:ext>
             </a:extLst>
           </p:cNvPr>
@@ -2291,7 +2291,7 @@
           <a:bodyPr/>
           <a:lstStyle/>
           <a:p>
-            <a:fld id="{3998C03A-F55B-44AA-8692-E621F04594BB}" type="datetimeFigureOut">
+            <a:fld id="{5F465989-7772-4AB3-9A7C-6EA849C6A8A8}" type="datetimeFigureOut">
               <a:rPr kumimoji="1" lang="ja-JP" altLang="en-US" smtClean="0"/>
               <a:t>2026/7/30</a:t>
             </a:fld>
@@ -2304,7 +2304,7 @@
           <p:cNvPr id="3" name="フッター プレースホルダー 2">
             <a:extLst>
               <a:ext uri="{FF2B5EF4-FFF2-40B4-BE49-F238E27FC236}">
-                <a16:creationId xmlns:a16="http://schemas.microsoft.com/office/drawing/2014/main" id="{E7FBE4AA-6B6F-21A8-391C-3F666C69417E}"/>
+                <a16:creationId xmlns:a16="http://schemas.microsoft.com/office/drawing/2014/main" id="{4D84EB0B-69A8-7EA4-9043-22A0757D3604}"/>
               </a:ext>
             </a:extLst>
           </p:cNvPr>
@@ -2329,7 +2329,7 @@
           <p:cNvPr id="4" name="スライド番号プレースホルダー 3">
             <a:extLst>
               <a:ext uri="{FF2B5EF4-FFF2-40B4-BE49-F238E27FC236}">
-                <a16:creationId xmlns:a16="http://schemas.microsoft.com/office/drawing/2014/main" id="{0DAE1EC8-B9A6-7F88-2760-0CCA4E926517}"/>
+                <a16:creationId xmlns:a16="http://schemas.microsoft.com/office/drawing/2014/main" id="{11A77449-743D-0752-4BE4-B5B543B85FEE}"/>
               </a:ext>
             </a:extLst>
           </p:cNvPr>
@@ -2345,7 +2345,7 @@
           <a:bodyPr/>
           <a:lstStyle/>
           <a:p>
-            <a:fld id="{AA5AB74D-6158-4197-B615-D7021483F7B9}" type="slidenum">
+            <a:fld id="{42891530-37DE-4816-8729-A04C044A10E6}" type="slidenum">
               <a:rPr kumimoji="1" lang="ja-JP" altLang="en-US" smtClean="0"/>
               <a:t>‹#›</a:t>
             </a:fld>
@@ -2356,7 +2356,7 @@
     </p:spTree>
     <p:extLst>
       <p:ext uri="{BB962C8B-B14F-4D97-AF65-F5344CB8AC3E}">
-        <p14:creationId xmlns:p14="http://schemas.microsoft.com/office/powerpoint/2010/main" val="1346730488"/>
+        <p14:creationId xmlns:p14="http://schemas.microsoft.com/office/powerpoint/2010/main" val="4023775722"/>
       </p:ext>
     </p:extLst>
   </p:cSld>
@@ -2388,7 +2388,7 @@
           <p:cNvPr id="2" name="タイトル 1">
             <a:extLst>
               <a:ext uri="{FF2B5EF4-FFF2-40B4-BE49-F238E27FC236}">
-                <a16:creationId xmlns:a16="http://schemas.microsoft.com/office/drawing/2014/main" id="{CF22C4DA-94D0-AECA-94A0-FD77C036FFFC}"/>
+                <a16:creationId xmlns:a16="http://schemas.microsoft.com/office/drawing/2014/main" id="{55577EF6-3BE5-70B4-F550-3715591CD957}"/>
               </a:ext>
             </a:extLst>
           </p:cNvPr>
@@ -2425,7 +2425,7 @@
           <p:cNvPr id="3" name="コンテンツ プレースホルダー 2">
             <a:extLst>
               <a:ext uri="{FF2B5EF4-FFF2-40B4-BE49-F238E27FC236}">
-                <a16:creationId xmlns:a16="http://schemas.microsoft.com/office/drawing/2014/main" id="{35907F02-E7C7-A185-A402-492479776AFA}"/>
+                <a16:creationId xmlns:a16="http://schemas.microsoft.com/office/drawing/2014/main" id="{839603FF-EF47-FF02-F13C-A156C98BEF24}"/>
               </a:ext>
             </a:extLst>
           </p:cNvPr>
@@ -2547,7 +2547,7 @@
           <p:cNvPr id="4" name="テキスト プレースホルダー 3">
             <a:extLst>
               <a:ext uri="{FF2B5EF4-FFF2-40B4-BE49-F238E27FC236}">
-                <a16:creationId xmlns:a16="http://schemas.microsoft.com/office/drawing/2014/main" id="{31E688B1-44EB-BCA7-3D40-6BCC75BD2737}"/>
+                <a16:creationId xmlns:a16="http://schemas.microsoft.com/office/drawing/2014/main" id="{FACF8836-8FB4-E40E-C6BD-11AE0D45293F}"/>
               </a:ext>
             </a:extLst>
           </p:cNvPr>
@@ -2618,7 +2618,7 @@
           <p:cNvPr id="5" name="日付プレースホルダー 4">
             <a:extLst>
               <a:ext uri="{FF2B5EF4-FFF2-40B4-BE49-F238E27FC236}">
-                <a16:creationId xmlns:a16="http://schemas.microsoft.com/office/drawing/2014/main" id="{A1451227-533C-10F3-14EB-E8DECACE3D45}"/>
+                <a16:creationId xmlns:a16="http://schemas.microsoft.com/office/drawing/2014/main" id="{246BC2B4-CB23-E444-099F-E50929E6E4F0}"/>
               </a:ext>
             </a:extLst>
           </p:cNvPr>
@@ -2634,7 +2634,7 @@
           <a:bodyPr/>
           <a:lstStyle/>
           <a:p>
-            <a:fld id="{3998C03A-F55B-44AA-8692-E621F04594BB}" type="datetimeFigureOut">
+            <a:fld id="{5F465989-7772-4AB3-9A7C-6EA849C6A8A8}" type="datetimeFigureOut">
               <a:rPr kumimoji="1" lang="ja-JP" altLang="en-US" smtClean="0"/>
               <a:t>2026/7/30</a:t>
             </a:fld>
@@ -2647,7 +2647,7 @@
           <p:cNvPr id="6" name="フッター プレースホルダー 5">
             <a:extLst>
               <a:ext uri="{FF2B5EF4-FFF2-40B4-BE49-F238E27FC236}">
-                <a16:creationId xmlns:a16="http://schemas.microsoft.com/office/drawing/2014/main" id="{8E7DCAB1-2C5D-46D4-280A-079ABF5112D7}"/>
+                <a16:creationId xmlns:a16="http://schemas.microsoft.com/office/drawing/2014/main" id="{E66E09C8-DBC8-9C85-E68D-ED74E6E322B9}"/>
               </a:ext>
             </a:extLst>
           </p:cNvPr>
@@ -2672,7 +2672,7 @@
           <p:cNvPr id="7" name="スライド番号プレースホルダー 6">
             <a:extLst>
               <a:ext uri="{FF2B5EF4-FFF2-40B4-BE49-F238E27FC236}">
-                <a16:creationId xmlns:a16="http://schemas.microsoft.com/office/drawing/2014/main" id="{8998AC27-7BCE-5753-5AAD-8872E6005AF2}"/>
+                <a16:creationId xmlns:a16="http://schemas.microsoft.com/office/drawing/2014/main" id="{922237B7-14D2-B3A1-3046-741BD9576C0F}"/>
               </a:ext>
             </a:extLst>
           </p:cNvPr>
@@ -2688,7 +2688,7 @@
           <a:bodyPr/>
           <a:lstStyle/>
           <a:p>
-            <a:fld id="{AA5AB74D-6158-4197-B615-D7021483F7B9}" type="slidenum">
+            <a:fld id="{42891530-37DE-4816-8729-A04C044A10E6}" type="slidenum">
               <a:rPr kumimoji="1" lang="ja-JP" altLang="en-US" smtClean="0"/>
               <a:t>‹#›</a:t>
             </a:fld>
@@ -2699,7 +2699,7 @@
     </p:spTree>
     <p:extLst>
       <p:ext uri="{BB962C8B-B14F-4D97-AF65-F5344CB8AC3E}">
-        <p14:creationId xmlns:p14="http://schemas.microsoft.com/office/powerpoint/2010/main" val="3047538722"/>
+        <p14:creationId xmlns:p14="http://schemas.microsoft.com/office/powerpoint/2010/main" val="430625373"/>
       </p:ext>
     </p:extLst>
   </p:cSld>
@@ -2731,7 +2731,7 @@
           <p:cNvPr id="2" name="タイトル 1">
             <a:extLst>
               <a:ext uri="{FF2B5EF4-FFF2-40B4-BE49-F238E27FC236}">
-                <a16:creationId xmlns:a16="http://schemas.microsoft.com/office/drawing/2014/main" id="{F70ACD52-FE7C-DD09-43CC-3711F1AE2042}"/>
+                <a16:creationId xmlns:a16="http://schemas.microsoft.com/office/drawing/2014/main" id="{BD3C17FF-049A-A42E-2EF7-E1E556314264}"/>
               </a:ext>
             </a:extLst>
           </p:cNvPr>
@@ -2768,7 +2768,7 @@
           <p:cNvPr id="3" name="図プレースホルダー 2">
             <a:extLst>
               <a:ext uri="{FF2B5EF4-FFF2-40B4-BE49-F238E27FC236}">
-                <a16:creationId xmlns:a16="http://schemas.microsoft.com/office/drawing/2014/main" id="{3A8ED4B0-0F85-BA29-9265-C6D86500C660}"/>
+                <a16:creationId xmlns:a16="http://schemas.microsoft.com/office/drawing/2014/main" id="{4333BBDB-6108-38C7-DECA-A4EE78FC135C}"/>
               </a:ext>
             </a:extLst>
           </p:cNvPr>
@@ -2835,7 +2835,7 @@
           <p:cNvPr id="4" name="テキスト プレースホルダー 3">
             <a:extLst>
               <a:ext uri="{FF2B5EF4-FFF2-40B4-BE49-F238E27FC236}">
-                <a16:creationId xmlns:a16="http://schemas.microsoft.com/office/drawing/2014/main" id="{F2B752A8-C1D3-5FD9-72A3-29CF3DA4D2FD}"/>
+                <a16:creationId xmlns:a16="http://schemas.microsoft.com/office/drawing/2014/main" id="{FB57F877-C340-206C-1CAF-FC21B29B6F6E}"/>
               </a:ext>
             </a:extLst>
           </p:cNvPr>
@@ -2906,7 +2906,7 @@
           <p:cNvPr id="5" name="日付プレースホルダー 4">
             <a:extLst>
               <a:ext uri="{FF2B5EF4-FFF2-40B4-BE49-F238E27FC236}">
-                <a16:creationId xmlns:a16="http://schemas.microsoft.com/office/drawing/2014/main" id="{B21BEE68-0DA5-DB58-EC3E-4B3FE207A75F}"/>
+                <a16:creationId xmlns:a16="http://schemas.microsoft.com/office/drawing/2014/main" id="{4D54CCE6-13AA-9479-55A7-9117FC4095D8}"/>
               </a:ext>
             </a:extLst>
           </p:cNvPr>
@@ -2922,7 +2922,7 @@
           <a:bodyPr/>
           <a:lstStyle/>
           <a:p>
-            <a:fld id="{3998C03A-F55B-44AA-8692-E621F04594BB}" type="datetimeFigureOut">
+            <a:fld id="{5F465989-7772-4AB3-9A7C-6EA849C6A8A8}" type="datetimeFigureOut">
               <a:rPr kumimoji="1" lang="ja-JP" altLang="en-US" smtClean="0"/>
               <a:t>2026/7/30</a:t>
             </a:fld>
@@ -2935,7 +2935,7 @@
           <p:cNvPr id="6" name="フッター プレースホルダー 5">
             <a:extLst>
               <a:ext uri="{FF2B5EF4-FFF2-40B4-BE49-F238E27FC236}">
-                <a16:creationId xmlns:a16="http://schemas.microsoft.com/office/drawing/2014/main" id="{C1CDDE47-5CEE-F4D1-623E-2D6F3F373C74}"/>
+                <a16:creationId xmlns:a16="http://schemas.microsoft.com/office/drawing/2014/main" id="{59E87CE5-A0DE-26CA-C7E3-64FBFFE37023}"/>
               </a:ext>
             </a:extLst>
           </p:cNvPr>
@@ -2960,7 +2960,7 @@
           <p:cNvPr id="7" name="スライド番号プレースホルダー 6">
             <a:extLst>
               <a:ext uri="{FF2B5EF4-FFF2-40B4-BE49-F238E27FC236}">
-                <a16:creationId xmlns:a16="http://schemas.microsoft.com/office/drawing/2014/main" id="{81FE1970-31EA-CAEC-7374-8AA421F35FA9}"/>
+                <a16:creationId xmlns:a16="http://schemas.microsoft.com/office/drawing/2014/main" id="{04EE7E6C-F01D-CDD1-9A1E-442CD8DDCD3A}"/>
               </a:ext>
             </a:extLst>
           </p:cNvPr>
@@ -2976,7 +2976,7 @@
           <a:bodyPr/>
           <a:lstStyle/>
           <a:p>
-            <a:fld id="{AA5AB74D-6158-4197-B615-D7021483F7B9}" type="slidenum">
+            <a:fld id="{42891530-37DE-4816-8729-A04C044A10E6}" type="slidenum">
               <a:rPr kumimoji="1" lang="ja-JP" altLang="en-US" smtClean="0"/>
               <a:t>‹#›</a:t>
             </a:fld>
@@ -2987,7 +2987,7 @@
     </p:spTree>
     <p:extLst>
       <p:ext uri="{BB962C8B-B14F-4D97-AF65-F5344CB8AC3E}">
-        <p14:creationId xmlns:p14="http://schemas.microsoft.com/office/powerpoint/2010/main" val="3277947816"/>
+        <p14:creationId xmlns:p14="http://schemas.microsoft.com/office/powerpoint/2010/main" val="1040909139"/>
       </p:ext>
     </p:extLst>
   </p:cSld>
@@ -3024,7 +3024,7 @@
           <p:cNvPr id="2" name="タイトル プレースホルダー 1">
             <a:extLst>
               <a:ext uri="{FF2B5EF4-FFF2-40B4-BE49-F238E27FC236}">
-                <a16:creationId xmlns:a16="http://schemas.microsoft.com/office/drawing/2014/main" id="{8D61C3C8-0C91-A1C5-6940-590ABC91A597}"/>
+                <a16:creationId xmlns:a16="http://schemas.microsoft.com/office/drawing/2014/main" id="{25720B1F-3682-C925-71FB-9387A5C4B40F}"/>
               </a:ext>
             </a:extLst>
           </p:cNvPr>
@@ -3062,7 +3062,7 @@
           <p:cNvPr id="3" name="テキスト プレースホルダー 2">
             <a:extLst>
               <a:ext uri="{FF2B5EF4-FFF2-40B4-BE49-F238E27FC236}">
-                <a16:creationId xmlns:a16="http://schemas.microsoft.com/office/drawing/2014/main" id="{A869039A-4717-04F6-C4B4-E66ABD860996}"/>
+                <a16:creationId xmlns:a16="http://schemas.microsoft.com/office/drawing/2014/main" id="{15FF1A85-3473-44F7-FDEC-9D615381AC26}"/>
               </a:ext>
             </a:extLst>
           </p:cNvPr>
@@ -3161,7 +3161,7 @@
           <p:cNvPr id="4" name="日付プレースホルダー 3">
             <a:extLst>
               <a:ext uri="{FF2B5EF4-FFF2-40B4-BE49-F238E27FC236}">
-                <a16:creationId xmlns:a16="http://schemas.microsoft.com/office/drawing/2014/main" id="{E2DAA3A9-2655-2411-A0DF-D6A1E4564BDD}"/>
+                <a16:creationId xmlns:a16="http://schemas.microsoft.com/office/drawing/2014/main" id="{1C4330B6-779F-B7AB-F457-33ACF1A7C92D}"/>
               </a:ext>
             </a:extLst>
           </p:cNvPr>
@@ -3195,7 +3195,7 @@
             </a:lvl1pPr>
           </a:lstStyle>
           <a:p>
-            <a:fld id="{3998C03A-F55B-44AA-8692-E621F04594BB}" type="datetimeFigureOut">
+            <a:fld id="{5F465989-7772-4AB3-9A7C-6EA849C6A8A8}" type="datetimeFigureOut">
               <a:rPr kumimoji="1" lang="ja-JP" altLang="en-US" smtClean="0"/>
               <a:t>2026/7/30</a:t>
             </a:fld>
@@ -3208,7 +3208,7 @@
           <p:cNvPr id="5" name="フッター プレースホルダー 4">
             <a:extLst>
               <a:ext uri="{FF2B5EF4-FFF2-40B4-BE49-F238E27FC236}">
-                <a16:creationId xmlns:a16="http://schemas.microsoft.com/office/drawing/2014/main" id="{0B521718-14BB-1239-A964-3191E7EC71A0}"/>
+                <a16:creationId xmlns:a16="http://schemas.microsoft.com/office/drawing/2014/main" id="{4CBF80EA-D23F-A9A1-242D-DEAE1608138D}"/>
               </a:ext>
             </a:extLst>
           </p:cNvPr>
@@ -3251,7 +3251,7 @@
           <p:cNvPr id="6" name="スライド番号プレースホルダー 5">
             <a:extLst>
               <a:ext uri="{FF2B5EF4-FFF2-40B4-BE49-F238E27FC236}">
-                <a16:creationId xmlns:a16="http://schemas.microsoft.com/office/drawing/2014/main" id="{D3141037-1D7C-D27A-1484-F5E89E46B3D2}"/>
+                <a16:creationId xmlns:a16="http://schemas.microsoft.com/office/drawing/2014/main" id="{D2B2A0BC-0B2B-5A7F-25B0-0E964E23E03A}"/>
               </a:ext>
             </a:extLst>
           </p:cNvPr>
@@ -3285,7 +3285,7 @@
             </a:lvl1pPr>
           </a:lstStyle>
           <a:p>
-            <a:fld id="{AA5AB74D-6158-4197-B615-D7021483F7B9}" type="slidenum">
+            <a:fld id="{42891530-37DE-4816-8729-A04C044A10E6}" type="slidenum">
               <a:rPr kumimoji="1" lang="ja-JP" altLang="en-US" smtClean="0"/>
               <a:t>‹#›</a:t>
             </a:fld>
@@ -3296,7 +3296,7 @@
     </p:spTree>
     <p:extLst>
       <p:ext uri="{BB962C8B-B14F-4D97-AF65-F5344CB8AC3E}">
-        <p14:creationId xmlns:p14="http://schemas.microsoft.com/office/powerpoint/2010/main" val="3634740080"/>
+        <p14:creationId xmlns:p14="http://schemas.microsoft.com/office/powerpoint/2010/main" val="2307990579"/>
       </p:ext>
     </p:extLst>
   </p:cSld>
@@ -3619,7 +3619,7 @@
           <p:cNvPr id="2" name="テキスト ボックス 1">
             <a:extLst>
               <a:ext uri="{FF2B5EF4-FFF2-40B4-BE49-F238E27FC236}">
-                <a16:creationId xmlns:a16="http://schemas.microsoft.com/office/drawing/2014/main" id="{755C3EEF-B9E6-A2F8-6293-4440C5D94625}"/>
+                <a16:creationId xmlns:a16="http://schemas.microsoft.com/office/drawing/2014/main" id="{008C690E-D4F3-E520-B38E-967725186F6F}"/>
               </a:ext>
             </a:extLst>
           </p:cNvPr>
@@ -3665,7 +3665,7 @@
           <p:cNvPr id="3" name="テキスト ボックス 2">
             <a:extLst>
               <a:ext uri="{FF2B5EF4-FFF2-40B4-BE49-F238E27FC236}">
-                <a16:creationId xmlns:a16="http://schemas.microsoft.com/office/drawing/2014/main" id="{5ADD9A9B-3829-29C3-B9DD-7B8DA5D2FC86}"/>
+                <a16:creationId xmlns:a16="http://schemas.microsoft.com/office/drawing/2014/main" id="{87AEDB03-9292-39ED-6844-790FDB6911F0}"/>
               </a:ext>
             </a:extLst>
           </p:cNvPr>
@@ -3714,7 +3714,7 @@
           <p:cNvPr id="4" name="テキスト ボックス 3">
             <a:extLst>
               <a:ext uri="{FF2B5EF4-FFF2-40B4-BE49-F238E27FC236}">
-                <a16:creationId xmlns:a16="http://schemas.microsoft.com/office/drawing/2014/main" id="{582D6A61-8887-0F65-DFAC-41A9DE2C407A}"/>
+                <a16:creationId xmlns:a16="http://schemas.microsoft.com/office/drawing/2014/main" id="{F6AEA592-E9B1-5E13-66E8-80B7F79DA075}"/>
               </a:ext>
             </a:extLst>
           </p:cNvPr>
@@ -3754,7 +3754,7 @@
           <p:cNvPr id="5" name="テキスト ボックス 4">
             <a:extLst>
               <a:ext uri="{FF2B5EF4-FFF2-40B4-BE49-F238E27FC236}">
-                <a16:creationId xmlns:a16="http://schemas.microsoft.com/office/drawing/2014/main" id="{FCAF76D3-5C23-2ED0-F855-6F64853FF9BD}"/>
+                <a16:creationId xmlns:a16="http://schemas.microsoft.com/office/drawing/2014/main" id="{579712B7-3F28-B7EC-7E34-504B3DB2C00A}"/>
               </a:ext>
             </a:extLst>
           </p:cNvPr>
@@ -3801,7 +3801,7 @@
             <a:hlinkClick r:id="" action="ppaction://media"/>
             <a:extLst>
               <a:ext uri="{FF2B5EF4-FFF2-40B4-BE49-F238E27FC236}">
-                <a16:creationId xmlns:a16="http://schemas.microsoft.com/office/drawing/2014/main" id="{CED4629C-2B31-760B-354E-414FD03AC122}"/>
+                <a16:creationId xmlns:a16="http://schemas.microsoft.com/office/drawing/2014/main" id="{2DF3AAC4-6064-A283-B5AC-693BF832FB78}"/>
               </a:ext>
             </a:extLst>
           </p:cNvPr>
@@ -3836,7 +3836,7 @@
     </p:spTree>
     <p:extLst>
       <p:ext uri="{BB962C8B-B14F-4D97-AF65-F5344CB8AC3E}">
-        <p14:creationId xmlns:p14="http://schemas.microsoft.com/office/powerpoint/2010/main" val="262406201"/>
+        <p14:creationId xmlns:p14="http://schemas.microsoft.com/office/powerpoint/2010/main" val="3546704339"/>
       </p:ext>
     </p:extLst>
   </p:cSld>
@@ -3960,7 +3960,7 @@
           <p:cNvPr id="2" name="テキスト ボックス 1">
             <a:extLst>
               <a:ext uri="{FF2B5EF4-FFF2-40B4-BE49-F238E27FC236}">
-                <a16:creationId xmlns:a16="http://schemas.microsoft.com/office/drawing/2014/main" id="{D6051CAF-7CB3-212E-331F-5D84F6C0A129}"/>
+                <a16:creationId xmlns:a16="http://schemas.microsoft.com/office/drawing/2014/main" id="{ED729E3B-073D-0CBE-F6E3-F5A36BC1DFA8}"/>
               </a:ext>
             </a:extLst>
           </p:cNvPr>
@@ -4006,7 +4006,7 @@
           <p:cNvPr id="3" name="テキスト ボックス 2">
             <a:extLst>
               <a:ext uri="{FF2B5EF4-FFF2-40B4-BE49-F238E27FC236}">
-                <a16:creationId xmlns:a16="http://schemas.microsoft.com/office/drawing/2014/main" id="{64D0EBF7-FE32-557B-5EF0-4D530F038A4B}"/>
+                <a16:creationId xmlns:a16="http://schemas.microsoft.com/office/drawing/2014/main" id="{87E4DBBF-696F-CB7B-67C2-5ADF2E89F8EF}"/>
               </a:ext>
             </a:extLst>
           </p:cNvPr>
@@ -4046,7 +4046,7 @@
           <p:cNvPr id="4" name="テキスト ボックス 3">
             <a:extLst>
               <a:ext uri="{FF2B5EF4-FFF2-40B4-BE49-F238E27FC236}">
-                <a16:creationId xmlns:a16="http://schemas.microsoft.com/office/drawing/2014/main" id="{22C6D1BB-076E-ECE3-5EB0-76FAEA3250C9}"/>
+                <a16:creationId xmlns:a16="http://schemas.microsoft.com/office/drawing/2014/main" id="{933B136D-0701-122C-D0AA-848398204600}"/>
               </a:ext>
             </a:extLst>
           </p:cNvPr>
@@ -4128,7 +4128,7 @@
           <p:cNvPr id="5" name="テキスト ボックス 4">
             <a:extLst>
               <a:ext uri="{FF2B5EF4-FFF2-40B4-BE49-F238E27FC236}">
-                <a16:creationId xmlns:a16="http://schemas.microsoft.com/office/drawing/2014/main" id="{497FBF34-567B-6D0B-D811-AB054B14D9F8}"/>
+                <a16:creationId xmlns:a16="http://schemas.microsoft.com/office/drawing/2014/main" id="{37B0331B-A258-3560-0D2F-B6F0AE1AF31A}"/>
               </a:ext>
             </a:extLst>
           </p:cNvPr>
@@ -4175,7 +4175,7 @@
             <a:hlinkClick r:id="" action="ppaction://media"/>
             <a:extLst>
               <a:ext uri="{FF2B5EF4-FFF2-40B4-BE49-F238E27FC236}">
-                <a16:creationId xmlns:a16="http://schemas.microsoft.com/office/drawing/2014/main" id="{1C42F258-DFAA-A41B-647E-1A13038C3B94}"/>
+                <a16:creationId xmlns:a16="http://schemas.microsoft.com/office/drawing/2014/main" id="{6D77BB57-BBC3-375D-2CF7-234FCE5D9F9E}"/>
               </a:ext>
             </a:extLst>
           </p:cNvPr>
@@ -4210,7 +4210,7 @@
     </p:spTree>
     <p:extLst>
       <p:ext uri="{BB962C8B-B14F-4D97-AF65-F5344CB8AC3E}">
-        <p14:creationId xmlns:p14="http://schemas.microsoft.com/office/powerpoint/2010/main" val="3656340539"/>
+        <p14:creationId xmlns:p14="http://schemas.microsoft.com/office/powerpoint/2010/main" val="3852948101"/>
       </p:ext>
     </p:extLst>
   </p:cSld>
@@ -4334,7 +4334,7 @@
           <p:cNvPr id="2" name="テキスト ボックス 1">
             <a:extLst>
               <a:ext uri="{FF2B5EF4-FFF2-40B4-BE49-F238E27FC236}">
-                <a16:creationId xmlns:a16="http://schemas.microsoft.com/office/drawing/2014/main" id="{336D8B51-4993-D0D1-7ED8-08E704CC24BC}"/>
+                <a16:creationId xmlns:a16="http://schemas.microsoft.com/office/drawing/2014/main" id="{046DF0F5-1B4C-C841-CA40-ED1744C24C87}"/>
               </a:ext>
             </a:extLst>
           </p:cNvPr>
@@ -4380,7 +4380,7 @@
           <p:cNvPr id="3" name="テキスト ボックス 2">
             <a:extLst>
               <a:ext uri="{FF2B5EF4-FFF2-40B4-BE49-F238E27FC236}">
-                <a16:creationId xmlns:a16="http://schemas.microsoft.com/office/drawing/2014/main" id="{BCB29FEC-1729-8B33-D716-7E8E77771DFF}"/>
+                <a16:creationId xmlns:a16="http://schemas.microsoft.com/office/drawing/2014/main" id="{C6C279EB-AE11-0B24-0515-C7927FBB02E8}"/>
               </a:ext>
             </a:extLst>
           </p:cNvPr>
@@ -4420,7 +4420,7 @@
           <p:cNvPr id="4" name="テキスト ボックス 3">
             <a:extLst>
               <a:ext uri="{FF2B5EF4-FFF2-40B4-BE49-F238E27FC236}">
-                <a16:creationId xmlns:a16="http://schemas.microsoft.com/office/drawing/2014/main" id="{50DC85F7-1061-4751-BA83-79FBDC4B82FD}"/>
+                <a16:creationId xmlns:a16="http://schemas.microsoft.com/office/drawing/2014/main" id="{91B1B746-2C05-CF7E-EEC2-375A43C051FA}"/>
               </a:ext>
             </a:extLst>
           </p:cNvPr>
@@ -4515,7 +4515,7 @@
           <p:cNvPr id="5" name="テキスト ボックス 4">
             <a:extLst>
               <a:ext uri="{FF2B5EF4-FFF2-40B4-BE49-F238E27FC236}">
-                <a16:creationId xmlns:a16="http://schemas.microsoft.com/office/drawing/2014/main" id="{12F9896C-FED3-8037-BF52-9D640CCFAC9A}"/>
+                <a16:creationId xmlns:a16="http://schemas.microsoft.com/office/drawing/2014/main" id="{F7B9920E-54CC-1904-E9FA-EF8A0745D922}"/>
               </a:ext>
             </a:extLst>
           </p:cNvPr>
@@ -4562,7 +4562,7 @@
             <a:hlinkClick r:id="" action="ppaction://media"/>
             <a:extLst>
               <a:ext uri="{FF2B5EF4-FFF2-40B4-BE49-F238E27FC236}">
-                <a16:creationId xmlns:a16="http://schemas.microsoft.com/office/drawing/2014/main" id="{73F3CB79-5037-19CF-EDE0-E6D873BB71DF}"/>
+                <a16:creationId xmlns:a16="http://schemas.microsoft.com/office/drawing/2014/main" id="{5A284CFC-DE2A-015B-F540-791A68290F93}"/>
               </a:ext>
             </a:extLst>
           </p:cNvPr>
@@ -4597,7 +4597,7 @@
     </p:spTree>
     <p:extLst>
       <p:ext uri="{BB962C8B-B14F-4D97-AF65-F5344CB8AC3E}">
-        <p14:creationId xmlns:p14="http://schemas.microsoft.com/office/powerpoint/2010/main" val="3878265855"/>
+        <p14:creationId xmlns:p14="http://schemas.microsoft.com/office/powerpoint/2010/main" val="3738154767"/>
       </p:ext>
     </p:extLst>
   </p:cSld>
@@ -4721,7 +4721,7 @@
           <p:cNvPr id="2" name="テキスト ボックス 1">
             <a:extLst>
               <a:ext uri="{FF2B5EF4-FFF2-40B4-BE49-F238E27FC236}">
-                <a16:creationId xmlns:a16="http://schemas.microsoft.com/office/drawing/2014/main" id="{07B7FA71-9CA6-D7A9-B915-B5D546FE83E8}"/>
+                <a16:creationId xmlns:a16="http://schemas.microsoft.com/office/drawing/2014/main" id="{CD988A52-7D6E-F7E9-D704-9BE60D8E4559}"/>
               </a:ext>
             </a:extLst>
           </p:cNvPr>
@@ -4767,7 +4767,7 @@
           <p:cNvPr id="3" name="テキスト ボックス 2">
             <a:extLst>
               <a:ext uri="{FF2B5EF4-FFF2-40B4-BE49-F238E27FC236}">
-                <a16:creationId xmlns:a16="http://schemas.microsoft.com/office/drawing/2014/main" id="{E435332A-1A16-A057-C8FA-5A230C9D8AFD}"/>
+                <a16:creationId xmlns:a16="http://schemas.microsoft.com/office/drawing/2014/main" id="{DAAECFEF-770E-A057-6349-EC158147E9AC}"/>
               </a:ext>
             </a:extLst>
           </p:cNvPr>
@@ -4807,7 +4807,7 @@
           <p:cNvPr id="4" name="テキスト ボックス 3">
             <a:extLst>
               <a:ext uri="{FF2B5EF4-FFF2-40B4-BE49-F238E27FC236}">
-                <a16:creationId xmlns:a16="http://schemas.microsoft.com/office/drawing/2014/main" id="{69064BFE-00FA-B553-0672-9DA3D4421B2F}"/>
+                <a16:creationId xmlns:a16="http://schemas.microsoft.com/office/drawing/2014/main" id="{17C0D59E-524F-3AD7-B34E-C973B74DE0E0}"/>
               </a:ext>
             </a:extLst>
           </p:cNvPr>
@@ -4917,7 +4917,7 @@
           <p:cNvPr id="5" name="テキスト ボックス 4">
             <a:extLst>
               <a:ext uri="{FF2B5EF4-FFF2-40B4-BE49-F238E27FC236}">
-                <a16:creationId xmlns:a16="http://schemas.microsoft.com/office/drawing/2014/main" id="{AA83EB66-9BD7-36D3-FDA2-8CC149AC9D09}"/>
+                <a16:creationId xmlns:a16="http://schemas.microsoft.com/office/drawing/2014/main" id="{A6D60B3A-74F3-A36F-40F9-18F7653B11E2}"/>
               </a:ext>
             </a:extLst>
           </p:cNvPr>
@@ -4964,7 +4964,7 @@
             <a:hlinkClick r:id="" action="ppaction://media"/>
             <a:extLst>
               <a:ext uri="{FF2B5EF4-FFF2-40B4-BE49-F238E27FC236}">
-                <a16:creationId xmlns:a16="http://schemas.microsoft.com/office/drawing/2014/main" id="{EC96E8E7-D1EA-D3F5-15E9-B2ACB57CC6D6}"/>
+                <a16:creationId xmlns:a16="http://schemas.microsoft.com/office/drawing/2014/main" id="{3677893D-1511-81CD-A369-5DC7E2173862}"/>
               </a:ext>
             </a:extLst>
           </p:cNvPr>
@@ -4999,7 +4999,7 @@
     </p:spTree>
     <p:extLst>
       <p:ext uri="{BB962C8B-B14F-4D97-AF65-F5344CB8AC3E}">
-        <p14:creationId xmlns:p14="http://schemas.microsoft.com/office/powerpoint/2010/main" val="3655046841"/>
+        <p14:creationId xmlns:p14="http://schemas.microsoft.com/office/powerpoint/2010/main" val="2446910676"/>
       </p:ext>
     </p:extLst>
   </p:cSld>
@@ -5123,7 +5123,7 @@
           <p:cNvPr id="2" name="テキスト ボックス 1">
             <a:extLst>
               <a:ext uri="{FF2B5EF4-FFF2-40B4-BE49-F238E27FC236}">
-                <a16:creationId xmlns:a16="http://schemas.microsoft.com/office/drawing/2014/main" id="{43BE8C3C-D9B6-51C6-D45A-0DB8C9BB6CC1}"/>
+                <a16:creationId xmlns:a16="http://schemas.microsoft.com/office/drawing/2014/main" id="{B490B180-F7F1-E809-13A1-5102BEBB7BCF}"/>
               </a:ext>
             </a:extLst>
           </p:cNvPr>
@@ -5169,7 +5169,7 @@
           <p:cNvPr id="3" name="テキスト ボックス 2">
             <a:extLst>
               <a:ext uri="{FF2B5EF4-FFF2-40B4-BE49-F238E27FC236}">
-                <a16:creationId xmlns:a16="http://schemas.microsoft.com/office/drawing/2014/main" id="{6FFF8EEF-D776-EEAF-01CC-C2C0FA69498A}"/>
+                <a16:creationId xmlns:a16="http://schemas.microsoft.com/office/drawing/2014/main" id="{7FFAA034-99B1-F8CC-F17C-EE05B08906AA}"/>
               </a:ext>
             </a:extLst>
           </p:cNvPr>
@@ -5209,7 +5209,7 @@
           <p:cNvPr id="4" name="テキスト ボックス 3">
             <a:extLst>
               <a:ext uri="{FF2B5EF4-FFF2-40B4-BE49-F238E27FC236}">
-                <a16:creationId xmlns:a16="http://schemas.microsoft.com/office/drawing/2014/main" id="{F2D38658-1F5F-5B45-BD32-FDB6C7B733C1}"/>
+                <a16:creationId xmlns:a16="http://schemas.microsoft.com/office/drawing/2014/main" id="{E05042D3-4357-CAA1-52C9-1BB8E78B4DA6}"/>
               </a:ext>
             </a:extLst>
           </p:cNvPr>
@@ -5233,20 +5233,14 @@
           <a:lstStyle/>
           <a:p>
             <a:r>
-              <a:rPr kumimoji="1" lang="en-US" altLang="ja-JP" sz="2000">
+              <a:rPr kumimoji="1" lang="ja-JP" altLang="en-US" sz="2000">
                 <a:solidFill>
                   <a:srgbClr val="333333"/>
                 </a:solidFill>
                 <a:latin typeface="Arial" panose="020B0604020202020204" pitchFamily="34" charset="0"/>
               </a:rPr>
-              <a:t>Set confirmed custom domain</a:t>
-            </a:r>
-            <a:endParaRPr kumimoji="1" lang="ja-JP" altLang="en-US" sz="2000">
-              <a:solidFill>
-                <a:srgbClr val="333333"/>
-              </a:solidFill>
-              <a:latin typeface="Arial" panose="020B0604020202020204" pitchFamily="34" charset="0"/>
-            </a:endParaRPr>
+              <a:t>直近のコミットでは、実装の見直しと継続的な改善が行われました。</a:t>
+            </a:r>
           </a:p>
         </p:txBody>
       </p:sp>
@@ -5255,7 +5249,7 @@
           <p:cNvPr id="5" name="テキスト ボックス 4">
             <a:extLst>
               <a:ext uri="{FF2B5EF4-FFF2-40B4-BE49-F238E27FC236}">
-                <a16:creationId xmlns:a16="http://schemas.microsoft.com/office/drawing/2014/main" id="{287DC41C-D5C2-B3F4-1937-C1B8AD7C9184}"/>
+                <a16:creationId xmlns:a16="http://schemas.microsoft.com/office/drawing/2014/main" id="{4FB02616-6876-6C36-4DC6-2EB429C88FC6}"/>
               </a:ext>
             </a:extLst>
           </p:cNvPr>
@@ -5302,7 +5296,7 @@
             <a:hlinkClick r:id="" action="ppaction://media"/>
             <a:extLst>
               <a:ext uri="{FF2B5EF4-FFF2-40B4-BE49-F238E27FC236}">
-                <a16:creationId xmlns:a16="http://schemas.microsoft.com/office/drawing/2014/main" id="{DA360A88-AB8B-0322-06C3-3CC25508DB35}"/>
+                <a16:creationId xmlns:a16="http://schemas.microsoft.com/office/drawing/2014/main" id="{51CEB579-B6BC-379E-0D54-21595875ACF1}"/>
               </a:ext>
             </a:extLst>
           </p:cNvPr>
@@ -5337,7 +5331,7 @@
     </p:spTree>
     <p:extLst>
       <p:ext uri="{BB962C8B-B14F-4D97-AF65-F5344CB8AC3E}">
-        <p14:creationId xmlns:p14="http://schemas.microsoft.com/office/powerpoint/2010/main" val="2906342444"/>
+        <p14:creationId xmlns:p14="http://schemas.microsoft.com/office/powerpoint/2010/main" val="3517043483"/>
       </p:ext>
     </p:extLst>
   </p:cSld>
@@ -5380,7 +5374,7 @@
                                   <p:childTnLst>
                                     <p:cmd type="call" cmd="playFrom(0.0)">
                                       <p:cBhvr>
-                                        <p:cTn id="6" dur="6451" fill="hold"/>
+                                        <p:cTn id="6" dur="6076" fill="hold"/>
                                         <p:tgtEl>
                                           <p:spTgt spid="6"/>
                                         </p:tgtEl>
@@ -5461,7 +5455,7 @@
           <p:cNvPr id="2" name="テキスト ボックス 1">
             <a:extLst>
               <a:ext uri="{FF2B5EF4-FFF2-40B4-BE49-F238E27FC236}">
-                <a16:creationId xmlns:a16="http://schemas.microsoft.com/office/drawing/2014/main" id="{D66B3654-067D-69B2-E256-4BB49C6DD657}"/>
+                <a16:creationId xmlns:a16="http://schemas.microsoft.com/office/drawing/2014/main" id="{CF6B193B-C0FD-DF99-49D2-61EC9AD85D4D}"/>
               </a:ext>
             </a:extLst>
           </p:cNvPr>
@@ -5507,7 +5501,7 @@
           <p:cNvPr id="3" name="テキスト ボックス 2">
             <a:extLst>
               <a:ext uri="{FF2B5EF4-FFF2-40B4-BE49-F238E27FC236}">
-                <a16:creationId xmlns:a16="http://schemas.microsoft.com/office/drawing/2014/main" id="{30C208E3-3780-4342-53EE-FB8941690A05}"/>
+                <a16:creationId xmlns:a16="http://schemas.microsoft.com/office/drawing/2014/main" id="{83B288DD-403F-92FF-DF1B-78F915665E98}"/>
               </a:ext>
             </a:extLst>
           </p:cNvPr>
@@ -5547,7 +5541,7 @@
           <p:cNvPr id="4" name="テキスト ボックス 3">
             <a:extLst>
               <a:ext uri="{FF2B5EF4-FFF2-40B4-BE49-F238E27FC236}">
-                <a16:creationId xmlns:a16="http://schemas.microsoft.com/office/drawing/2014/main" id="{D9676AD8-6FDF-2E53-2E29-9190D4038575}"/>
+                <a16:creationId xmlns:a16="http://schemas.microsoft.com/office/drawing/2014/main" id="{70EC6ABF-2E76-FC64-A6E6-3A2B42DC3AFE}"/>
               </a:ext>
             </a:extLst>
           </p:cNvPr>
@@ -5612,7 +5606,7 @@
           <p:cNvPr id="5" name="テキスト ボックス 4">
             <a:extLst>
               <a:ext uri="{FF2B5EF4-FFF2-40B4-BE49-F238E27FC236}">
-                <a16:creationId xmlns:a16="http://schemas.microsoft.com/office/drawing/2014/main" id="{4F13975F-F848-6B10-39D4-1B008886E744}"/>
+                <a16:creationId xmlns:a16="http://schemas.microsoft.com/office/drawing/2014/main" id="{D5D6ED01-5DF6-D95A-E7BB-6D54611F8E5B}"/>
               </a:ext>
             </a:extLst>
           </p:cNvPr>
@@ -5659,7 +5653,7 @@
             <a:hlinkClick r:id="" action="ppaction://media"/>
             <a:extLst>
               <a:ext uri="{FF2B5EF4-FFF2-40B4-BE49-F238E27FC236}">
-                <a16:creationId xmlns:a16="http://schemas.microsoft.com/office/drawing/2014/main" id="{FF69BA43-04B2-B30F-CE5E-038A490E47D2}"/>
+                <a16:creationId xmlns:a16="http://schemas.microsoft.com/office/drawing/2014/main" id="{75635460-9F22-1CE8-9FBC-D5B8B3C00B0E}"/>
               </a:ext>
             </a:extLst>
           </p:cNvPr>
@@ -5694,7 +5688,7 @@
     </p:spTree>
     <p:extLst>
       <p:ext uri="{BB962C8B-B14F-4D97-AF65-F5344CB8AC3E}">
-        <p14:creationId xmlns:p14="http://schemas.microsoft.com/office/powerpoint/2010/main" val="1951294599"/>
+        <p14:creationId xmlns:p14="http://schemas.microsoft.com/office/powerpoint/2010/main" val="1924844466"/>
       </p:ext>
     </p:extLst>
   </p:cSld>
